--- a/internal_doc/01.需求特性/SequoiaDB_BP(2015_1&2).pptx
+++ b/internal_doc/01.需求特性/SequoiaDB_BP(2015_1&2).pptx
@@ -2860,15 +2860,7 @@
                   <a:schemeClr val="bg1"/>
                 </a:solidFill>
               </a:rPr>
-              <a:t>季</a:t>
-            </a:r>
-            <a:r>
-              <a:rPr lang="zh-CN" altLang="en-US" sz="2400" dirty="0" smtClean="0">
-                <a:solidFill>
-                  <a:schemeClr val="bg1"/>
-                </a:solidFill>
-              </a:rPr>
-              <a:t>度</a:t>
+              <a:t>季度</a:t>
             </a:r>
             <a:endParaRPr lang="zh-CN" altLang="en-US" sz="2400" dirty="0">
               <a:solidFill>
@@ -2939,11 +2931,7 @@
             </a:r>
             <a:r>
               <a:rPr lang="zh-CN" altLang="en-US" dirty="0" smtClean="0"/>
-              <a:t>季</a:t>
-            </a:r>
-            <a:r>
-              <a:rPr lang="zh-CN" altLang="en-US" dirty="0" smtClean="0"/>
-              <a:t>度总体目标</a:t>
+              <a:t>季度总体目标</a:t>
             </a:r>
             <a:endParaRPr lang="zh-CN" altLang="en-US" dirty="0"/>
           </a:p>
@@ -2976,11 +2964,7 @@
             <a:pPr lvl="1"/>
             <a:r>
               <a:rPr lang="zh-CN" altLang="en-US" sz="1800" dirty="0" smtClean="0"/>
-              <a:t>以</a:t>
-            </a:r>
-            <a:r>
-              <a:rPr lang="zh-CN" altLang="en-US" sz="1800" dirty="0" smtClean="0"/>
-              <a:t>“</a:t>
+              <a:t>以“</a:t>
             </a:r>
             <a:r>
               <a:rPr lang="zh-CN" altLang="en-US" sz="1800" b="1" dirty="0" smtClean="0">
@@ -2992,11 +2976,7 @@
             </a:r>
             <a:r>
               <a:rPr lang="zh-CN" altLang="en-US" sz="1800" dirty="0" smtClean="0"/>
-              <a:t>”</a:t>
-            </a:r>
-            <a:r>
-              <a:rPr lang="zh-CN" altLang="en-US" sz="1800" dirty="0" smtClean="0"/>
-              <a:t>和“</a:t>
+              <a:t>”和“</a:t>
             </a:r>
             <a:r>
               <a:rPr lang="zh-CN" altLang="en-US" sz="1800" b="1" dirty="0" smtClean="0">
@@ -3016,7 +2996,11 @@
                   <a:srgbClr val="FF0000"/>
                 </a:solidFill>
               </a:rPr>
-              <a:t>优</a:t>
+              <a:t>优化性能</a:t>
+            </a:r>
+            <a:r>
+              <a:rPr lang="zh-CN" altLang="en-US" sz="1800" dirty="0" smtClean="0"/>
+              <a:t>和</a:t>
             </a:r>
             <a:r>
               <a:rPr lang="zh-CN" altLang="en-US" sz="1800" b="1" dirty="0" smtClean="0">
@@ -3024,27 +3008,7 @@
                   <a:srgbClr val="FF0000"/>
                 </a:solidFill>
               </a:rPr>
-              <a:t>化性能</a:t>
-            </a:r>
-            <a:r>
-              <a:rPr lang="zh-CN" altLang="en-US" sz="1800" dirty="0" smtClean="0"/>
-              <a:t>和</a:t>
-            </a:r>
-            <a:r>
-              <a:rPr lang="zh-CN" altLang="en-US" sz="1800" b="1" dirty="0" smtClean="0">
-                <a:solidFill>
-                  <a:srgbClr val="FF0000"/>
-                </a:solidFill>
-              </a:rPr>
-              <a:t>完善</a:t>
-            </a:r>
-            <a:r>
-              <a:rPr lang="zh-CN" altLang="en-US" sz="1800" b="1" dirty="0" smtClean="0">
-                <a:solidFill>
-                  <a:srgbClr val="FF0000"/>
-                </a:solidFill>
-              </a:rPr>
-              <a:t>功能</a:t>
+              <a:t>完善功能</a:t>
             </a:r>
             <a:endParaRPr lang="en-US" altLang="zh-CN" sz="1800" b="1" dirty="0" smtClean="0">
               <a:solidFill>
@@ -3071,15 +3035,7 @@
             </a:r>
             <a:r>
               <a:rPr lang="zh-CN" altLang="en-US" sz="1800" dirty="0" smtClean="0"/>
-              <a:t>：</a:t>
-            </a:r>
-            <a:r>
-              <a:rPr lang="zh-CN" altLang="en-US" sz="1800" dirty="0" smtClean="0"/>
-              <a:t>发</a:t>
-            </a:r>
-            <a:r>
-              <a:rPr lang="zh-CN" altLang="en-US" sz="1800" dirty="0" smtClean="0"/>
-              <a:t>布</a:t>
+              <a:t>：发布</a:t>
             </a:r>
             <a:r>
               <a:rPr lang="en-US" altLang="zh-CN" sz="1800" dirty="0" smtClean="0"/>
@@ -3087,11 +3043,7 @@
             </a:r>
             <a:r>
               <a:rPr lang="zh-CN" altLang="en-US" sz="1800" dirty="0" smtClean="0"/>
-              <a:t>增强版</a:t>
-            </a:r>
-            <a:r>
-              <a:rPr lang="zh-CN" altLang="en-US" sz="1800" dirty="0" smtClean="0"/>
-              <a:t>（</a:t>
+              <a:t>增强版（</a:t>
             </a:r>
             <a:r>
               <a:rPr lang="en-US" altLang="zh-CN" sz="1800" dirty="0" smtClean="0"/>
@@ -3099,11 +3051,7 @@
             </a:r>
             <a:r>
               <a:rPr lang="zh-CN" altLang="en-US" sz="1800" dirty="0" smtClean="0"/>
-              <a:t>工</a:t>
-            </a:r>
-            <a:r>
-              <a:rPr lang="zh-CN" altLang="en-US" sz="1800" dirty="0" smtClean="0"/>
-              <a:t>作日）</a:t>
+              <a:t>工作日）</a:t>
             </a:r>
             <a:endParaRPr lang="en-US" altLang="zh-CN" sz="1800" dirty="0" smtClean="0"/>
           </a:p>
@@ -3115,11 +3063,7 @@
             </a:r>
             <a:r>
               <a:rPr lang="zh-CN" altLang="en-US" sz="1800" dirty="0" smtClean="0"/>
-              <a:t>：</a:t>
-            </a:r>
-            <a:r>
-              <a:rPr lang="zh-CN" altLang="en-US" sz="1800" dirty="0" smtClean="0"/>
-              <a:t>发布</a:t>
+              <a:t>：发布</a:t>
             </a:r>
             <a:r>
               <a:rPr lang="en-US" altLang="zh-CN" sz="1800" dirty="0" smtClean="0"/>
@@ -3294,11 +3238,7 @@
             </a:r>
             <a:r>
               <a:rPr lang="zh-CN" altLang="en-US" dirty="0" smtClean="0"/>
-              <a:t>版</a:t>
-            </a:r>
-            <a:r>
-              <a:rPr lang="zh-CN" altLang="en-US" dirty="0" smtClean="0"/>
-              <a:t>本</a:t>
+              <a:t>版本</a:t>
             </a:r>
             <a:endParaRPr lang="en-US" altLang="zh-CN" dirty="0" smtClean="0"/>
           </a:p>
@@ -3314,11 +3254,7 @@
             </a:r>
             <a:r>
               <a:rPr lang="zh-CN" altLang="en-US" dirty="0" smtClean="0"/>
-              <a:t>版</a:t>
-            </a:r>
-            <a:r>
-              <a:rPr lang="zh-CN" altLang="en-US" dirty="0" smtClean="0"/>
-              <a:t>本</a:t>
+              <a:t>版本</a:t>
             </a:r>
             <a:endParaRPr lang="en-US" altLang="zh-CN" dirty="0" smtClean="0"/>
           </a:p>
@@ -3334,11 +3270,7 @@
             </a:r>
             <a:r>
               <a:rPr lang="zh-CN" altLang="en-US" dirty="0" smtClean="0"/>
-              <a:t>版</a:t>
-            </a:r>
-            <a:r>
-              <a:rPr lang="zh-CN" altLang="en-US" dirty="0" smtClean="0"/>
-              <a:t>本</a:t>
+              <a:t>版本</a:t>
             </a:r>
             <a:endParaRPr lang="zh-CN" altLang="en-US" dirty="0"/>
           </a:p>
@@ -3393,11 +3325,7 @@
           <a:p>
             <a:r>
               <a:rPr lang="zh-CN" altLang="en-US" dirty="0" smtClean="0"/>
-              <a:t>版</a:t>
-            </a:r>
-            <a:r>
-              <a:rPr lang="zh-CN" altLang="en-US" dirty="0" smtClean="0"/>
-              <a:t>本主要特性</a:t>
+              <a:t>版本主要特性</a:t>
             </a:r>
             <a:endParaRPr lang="zh-CN" altLang="en-US" dirty="0"/>
           </a:p>
@@ -5772,11 +5700,7 @@
           <a:p>
             <a:r>
               <a:rPr lang="zh-CN" altLang="en-US" dirty="0" smtClean="0"/>
-              <a:t>版</a:t>
-            </a:r>
-            <a:r>
-              <a:rPr lang="zh-CN" altLang="en-US" dirty="0" smtClean="0"/>
-              <a:t>本主要特性</a:t>
+              <a:t>版本主要特性</a:t>
             </a:r>
             <a:endParaRPr lang="zh-CN" altLang="en-US" dirty="0"/>
           </a:p>
@@ -8171,66 +8095,54 @@
             <a:pPr lvl="1"/>
             <a:r>
               <a:rPr lang="zh-CN" altLang="en-US" dirty="0" smtClean="0"/>
-              <a:t>时间</a:t>
+              <a:t>时间：</a:t>
+            </a:r>
+            <a:r>
+              <a:rPr lang="en-US" altLang="zh-CN" dirty="0" smtClean="0"/>
+              <a:t>76</a:t>
+            </a:r>
+            <a:r>
+              <a:rPr lang="zh-CN" altLang="en-US" dirty="0" smtClean="0"/>
+              <a:t>天（工作日）</a:t>
+            </a:r>
+            <a:endParaRPr lang="en-US" altLang="zh-CN" dirty="0" smtClean="0"/>
+          </a:p>
+          <a:p>
+            <a:pPr lvl="1"/>
+            <a:r>
+              <a:rPr lang="zh-CN" altLang="en-US" dirty="0" smtClean="0"/>
+              <a:t>开发：</a:t>
+            </a:r>
+            <a:r>
+              <a:rPr lang="en-US" altLang="zh-CN" dirty="0" smtClean="0"/>
+              <a:t>7*76=532</a:t>
+            </a:r>
+            <a:r>
+              <a:rPr lang="zh-CN" altLang="en-US" dirty="0" smtClean="0"/>
+              <a:t>人天</a:t>
+            </a:r>
+            <a:endParaRPr lang="en-US" altLang="zh-CN" dirty="0" smtClean="0"/>
+          </a:p>
+          <a:p>
+            <a:pPr lvl="1"/>
+            <a:r>
+              <a:rPr lang="zh-CN" altLang="en-US" dirty="0" smtClean="0"/>
+              <a:t>测试</a:t>
             </a:r>
             <a:r>
               <a:rPr lang="zh-CN" altLang="en-US" dirty="0" smtClean="0"/>
               <a:t>：</a:t>
             </a:r>
             <a:r>
-              <a:rPr lang="en-US" altLang="zh-CN" dirty="0" smtClean="0"/>
-              <a:t>76</a:t>
-            </a:r>
-            <a:r>
-              <a:rPr lang="zh-CN" altLang="en-US" dirty="0" smtClean="0"/>
-              <a:t>天</a:t>
-            </a:r>
-            <a:r>
-              <a:rPr lang="zh-CN" altLang="en-US" dirty="0" smtClean="0"/>
-              <a:t>（工作日）</a:t>
-            </a:r>
-            <a:endParaRPr lang="en-US" altLang="zh-CN" dirty="0" smtClean="0"/>
-          </a:p>
-          <a:p>
-            <a:pPr lvl="1"/>
-            <a:r>
-              <a:rPr lang="zh-CN" altLang="en-US" dirty="0" smtClean="0"/>
-              <a:t>开发</a:t>
-            </a:r>
-            <a:r>
-              <a:rPr lang="zh-CN" altLang="en-US" dirty="0" smtClean="0"/>
-              <a:t>：</a:t>
-            </a:r>
-            <a:r>
-              <a:rPr lang="en-US" altLang="zh-CN" dirty="0" smtClean="0"/>
-              <a:t>7*76=532</a:t>
-            </a:r>
-            <a:r>
-              <a:rPr lang="zh-CN" altLang="en-US" dirty="0" smtClean="0"/>
-              <a:t>人</a:t>
-            </a:r>
-            <a:r>
-              <a:rPr lang="zh-CN" altLang="en-US" dirty="0" smtClean="0"/>
-              <a:t>天</a:t>
-            </a:r>
-            <a:endParaRPr lang="en-US" altLang="zh-CN" dirty="0" smtClean="0"/>
-          </a:p>
-          <a:p>
-            <a:pPr lvl="1"/>
-            <a:r>
-              <a:rPr lang="zh-CN" altLang="en-US" dirty="0" smtClean="0"/>
-              <a:t>测试</a:t>
-            </a:r>
-            <a:r>
-              <a:rPr lang="zh-CN" altLang="en-US" dirty="0" smtClean="0"/>
-              <a:t>：</a:t>
-            </a:r>
-            <a:r>
-              <a:rPr lang="en-US" altLang="zh-CN" dirty="0" smtClean="0"/>
-              <a:t>5*76=380</a:t>
-            </a:r>
-            <a:r>
-              <a:rPr lang="zh-CN" altLang="en-US" dirty="0" smtClean="0"/>
+              <a:rPr lang="en-US" altLang="zh-CN" smtClean="0"/>
+              <a:t>6</a:t>
+            </a:r>
+            <a:r>
+              <a:rPr lang="en-US" altLang="zh-CN" smtClean="0"/>
+              <a:t>*76=456</a:t>
+            </a:r>
+            <a:r>
+              <a:rPr lang="zh-CN" altLang="en-US" smtClean="0"/>
               <a:t>人</a:t>
             </a:r>
             <a:r>
@@ -8262,11 +8174,7 @@
             </a:r>
             <a:r>
               <a:rPr lang="zh-CN" altLang="en-US" dirty="0" smtClean="0"/>
-              <a:t>人</a:t>
-            </a:r>
-            <a:r>
-              <a:rPr lang="zh-CN" altLang="en-US" dirty="0" smtClean="0"/>
-              <a:t>天</a:t>
+              <a:t>人天</a:t>
             </a:r>
             <a:endParaRPr lang="en-US" altLang="zh-CN" dirty="0" smtClean="0"/>
           </a:p>
@@ -8281,11 +8189,7 @@
             <a:pPr lvl="1"/>
             <a:r>
               <a:rPr lang="zh-CN" altLang="en-US" dirty="0" smtClean="0"/>
-              <a:t>问题处理</a:t>
-            </a:r>
-            <a:r>
-              <a:rPr lang="zh-CN" altLang="en-US" dirty="0" smtClean="0"/>
-              <a:t>：</a:t>
+              <a:t>问题处理：</a:t>
             </a:r>
             <a:r>
               <a:rPr lang="en-US" altLang="zh-CN" dirty="0" smtClean="0"/>
@@ -8293,23 +8197,15 @@
             </a:r>
             <a:r>
               <a:rPr lang="zh-CN" altLang="en-US" dirty="0" smtClean="0"/>
-              <a:t>人</a:t>
-            </a:r>
+              <a:t>人天</a:t>
+            </a:r>
+            <a:endParaRPr lang="en-US" altLang="zh-CN" dirty="0" smtClean="0"/>
+          </a:p>
+          <a:p>
+            <a:pPr lvl="1"/>
             <a:r>
               <a:rPr lang="zh-CN" altLang="en-US" dirty="0" smtClean="0"/>
-              <a:t>天</a:t>
-            </a:r>
-            <a:endParaRPr lang="en-US" altLang="zh-CN" dirty="0" smtClean="0"/>
-          </a:p>
-          <a:p>
-            <a:pPr lvl="1"/>
-            <a:r>
-              <a:rPr lang="zh-CN" altLang="en-US" dirty="0" smtClean="0"/>
-              <a:t>其它优化</a:t>
-            </a:r>
-            <a:r>
-              <a:rPr lang="zh-CN" altLang="en-US" dirty="0" smtClean="0"/>
-              <a:t>：</a:t>
+              <a:t>其它优化：</a:t>
             </a:r>
             <a:r>
               <a:rPr lang="en-US" altLang="zh-CN" dirty="0" smtClean="0"/>
@@ -8317,11 +8213,7 @@
             </a:r>
             <a:r>
               <a:rPr lang="zh-CN" altLang="en-US" dirty="0" smtClean="0"/>
-              <a:t>人</a:t>
-            </a:r>
-            <a:r>
-              <a:rPr lang="zh-CN" altLang="en-US" dirty="0" smtClean="0"/>
-              <a:t>天</a:t>
+              <a:t>人天</a:t>
             </a:r>
             <a:endParaRPr lang="en-US" altLang="zh-CN" dirty="0" smtClean="0"/>
           </a:p>
@@ -8357,11 +8249,7 @@
             </a:r>
             <a:r>
               <a:rPr lang="zh-CN" altLang="en-US" dirty="0" smtClean="0"/>
-              <a:t>人</a:t>
-            </a:r>
-            <a:r>
-              <a:rPr lang="zh-CN" altLang="en-US" dirty="0" smtClean="0"/>
-              <a:t>天</a:t>
+              <a:t>人天</a:t>
             </a:r>
             <a:endParaRPr lang="en-US" altLang="zh-CN" dirty="0" smtClean="0"/>
           </a:p>
@@ -8498,15 +8386,7 @@
                   <a:srgbClr val="000099"/>
                 </a:solidFill>
               </a:rPr>
-              <a:t>开发任务要细化到周，要及时反馈风险；出现问题和开展重构要及时沟通，确保进</a:t>
-            </a:r>
-            <a:r>
-              <a:rPr lang="zh-CN" altLang="en-US" b="1" dirty="0" smtClean="0">
-                <a:solidFill>
-                  <a:srgbClr val="000099"/>
-                </a:solidFill>
-              </a:rPr>
-              <a:t>度</a:t>
+              <a:t>开发任务要细化到周，要及时反馈风险；出现问题和开展重构要及时沟通，确保进度</a:t>
             </a:r>
             <a:endParaRPr lang="en-US" altLang="zh-CN" b="1" dirty="0" smtClean="0">
               <a:solidFill>
@@ -8535,7 +8415,6 @@
               <a:rPr lang="en-US" altLang="zh-CN" dirty="0" smtClean="0"/>
               <a:t>5:45-6:00</a:t>
             </a:r>
-            <a:endParaRPr lang="en-US" altLang="zh-CN" dirty="0" smtClean="0"/>
           </a:p>
           <a:p>
             <a:pPr lvl="1"/>
